--- a/lecons/USA/Economic Geography/23_USA_ECO_L19_Industrial_Agglomerations.pptx
+++ b/lecons/USA/Economic Geography/23_USA_ECO_L19_Industrial_Agglomerations.pptx
@@ -3195,7 +3195,7 @@
           <a:p>
             <a:r>
               <a:rPr lang="en-US" dirty="0"/>
-              <a:t>We continue with Meaning and Global Industrial Zones. Copy this carefully.</a:t>
+              <a:t>We continue with Meaning and Global Industrial Zones. On this slide we have Newly industrialised countries (NICs) include the Asian Tigers (South Korea, Taiwan, Singapore, Hong Kong), the "dragon" economies and China, the "factory of the world".. Write each point on a new line, with the key term first, and explain it in your own words when we revise.</a:t>
             </a:r>
             <a:endParaRPr lang="en-US" dirty="0"/>
           </a:p>
